--- a/画图.pptx
+++ b/画图.pptx
@@ -104,6 +104,11 @@
       </a:defRPr>
     </a:lvl9pPr>
   </p:defaultTextStyle>
+  <p:extLst>
+    <p:ext uri="{EFAFB233-063F-42B5-8137-9DF3F51BA10A}">
+      <p15:sldGuideLst xmlns:p15="http://schemas.microsoft.com/office/powerpoint/2012/main"/>
+    </p:ext>
+  </p:extLst>
 </p:presentation>
 </file>
 
@@ -254,7 +259,7 @@
           <a:p>
             <a:fld id="{977AF1D3-8306-4B07-9FD3-AA8FA83997A9}" type="datetimeFigureOut">
               <a:rPr lang="zh-CN" altLang="en-US" smtClean="0"/>
-              <a:t>2026/7/14</a:t>
+              <a:t>2026/7/15</a:t>
             </a:fld>
             <a:endParaRPr lang="zh-CN" altLang="en-US"/>
           </a:p>
@@ -452,7 +457,7 @@
           <a:p>
             <a:fld id="{977AF1D3-8306-4B07-9FD3-AA8FA83997A9}" type="datetimeFigureOut">
               <a:rPr lang="zh-CN" altLang="en-US" smtClean="0"/>
-              <a:t>2026/7/14</a:t>
+              <a:t>2026/7/15</a:t>
             </a:fld>
             <a:endParaRPr lang="zh-CN" altLang="en-US"/>
           </a:p>
@@ -660,7 +665,7 @@
           <a:p>
             <a:fld id="{977AF1D3-8306-4B07-9FD3-AA8FA83997A9}" type="datetimeFigureOut">
               <a:rPr lang="zh-CN" altLang="en-US" smtClean="0"/>
-              <a:t>2026/7/14</a:t>
+              <a:t>2026/7/15</a:t>
             </a:fld>
             <a:endParaRPr lang="zh-CN" altLang="en-US"/>
           </a:p>
@@ -858,7 +863,7 @@
           <a:p>
             <a:fld id="{977AF1D3-8306-4B07-9FD3-AA8FA83997A9}" type="datetimeFigureOut">
               <a:rPr lang="zh-CN" altLang="en-US" smtClean="0"/>
-              <a:t>2026/7/14</a:t>
+              <a:t>2026/7/15</a:t>
             </a:fld>
             <a:endParaRPr lang="zh-CN" altLang="en-US"/>
           </a:p>
@@ -1133,7 +1138,7 @@
           <a:p>
             <a:fld id="{977AF1D3-8306-4B07-9FD3-AA8FA83997A9}" type="datetimeFigureOut">
               <a:rPr lang="zh-CN" altLang="en-US" smtClean="0"/>
-              <a:t>2026/7/14</a:t>
+              <a:t>2026/7/15</a:t>
             </a:fld>
             <a:endParaRPr lang="zh-CN" altLang="en-US"/>
           </a:p>
@@ -1398,7 +1403,7 @@
           <a:p>
             <a:fld id="{977AF1D3-8306-4B07-9FD3-AA8FA83997A9}" type="datetimeFigureOut">
               <a:rPr lang="zh-CN" altLang="en-US" smtClean="0"/>
-              <a:t>2026/7/14</a:t>
+              <a:t>2026/7/15</a:t>
             </a:fld>
             <a:endParaRPr lang="zh-CN" altLang="en-US"/>
           </a:p>
@@ -1810,7 +1815,7 @@
           <a:p>
             <a:fld id="{977AF1D3-8306-4B07-9FD3-AA8FA83997A9}" type="datetimeFigureOut">
               <a:rPr lang="zh-CN" altLang="en-US" smtClean="0"/>
-              <a:t>2026/7/14</a:t>
+              <a:t>2026/7/15</a:t>
             </a:fld>
             <a:endParaRPr lang="zh-CN" altLang="en-US"/>
           </a:p>
@@ -1951,7 +1956,7 @@
           <a:p>
             <a:fld id="{977AF1D3-8306-4B07-9FD3-AA8FA83997A9}" type="datetimeFigureOut">
               <a:rPr lang="zh-CN" altLang="en-US" smtClean="0"/>
-              <a:t>2026/7/14</a:t>
+              <a:t>2026/7/15</a:t>
             </a:fld>
             <a:endParaRPr lang="zh-CN" altLang="en-US"/>
           </a:p>
@@ -2064,7 +2069,7 @@
           <a:p>
             <a:fld id="{977AF1D3-8306-4B07-9FD3-AA8FA83997A9}" type="datetimeFigureOut">
               <a:rPr lang="zh-CN" altLang="en-US" smtClean="0"/>
-              <a:t>2026/7/14</a:t>
+              <a:t>2026/7/15</a:t>
             </a:fld>
             <a:endParaRPr lang="zh-CN" altLang="en-US"/>
           </a:p>
@@ -2375,7 +2380,7 @@
           <a:p>
             <a:fld id="{977AF1D3-8306-4B07-9FD3-AA8FA83997A9}" type="datetimeFigureOut">
               <a:rPr lang="zh-CN" altLang="en-US" smtClean="0"/>
-              <a:t>2026/7/14</a:t>
+              <a:t>2026/7/15</a:t>
             </a:fld>
             <a:endParaRPr lang="zh-CN" altLang="en-US"/>
           </a:p>
@@ -2663,7 +2668,7 @@
           <a:p>
             <a:fld id="{977AF1D3-8306-4B07-9FD3-AA8FA83997A9}" type="datetimeFigureOut">
               <a:rPr lang="zh-CN" altLang="en-US" smtClean="0"/>
-              <a:t>2026/7/14</a:t>
+              <a:t>2026/7/15</a:t>
             </a:fld>
             <a:endParaRPr lang="zh-CN" altLang="en-US"/>
           </a:p>
@@ -2904,7 +2909,7 @@
           <a:p>
             <a:fld id="{977AF1D3-8306-4B07-9FD3-AA8FA83997A9}" type="datetimeFigureOut">
               <a:rPr lang="zh-CN" altLang="en-US" smtClean="0"/>
-              <a:t>2026/7/14</a:t>
+              <a:t>2026/7/15</a:t>
             </a:fld>
             <a:endParaRPr lang="zh-CN" altLang="en-US"/>
           </a:p>
@@ -3323,10 +3328,10 @@
       </p:grpSpPr>
       <p:grpSp>
         <p:nvGrpSpPr>
-          <p:cNvPr id="181" name="组合 180">
+          <p:cNvPr id="2" name="组合 1">
             <a:extLst>
               <a:ext uri="{FF2B5EF4-FFF2-40B4-BE49-F238E27FC236}">
-                <a16:creationId xmlns:a16="http://schemas.microsoft.com/office/drawing/2014/main" id="{D24B4AAA-DA50-02ED-7B9E-1109285FDA9D}"/>
+                <a16:creationId xmlns:a16="http://schemas.microsoft.com/office/drawing/2014/main" id="{2629403C-4A5D-6F9A-CD14-04D240436808}"/>
               </a:ext>
             </a:extLst>
           </p:cNvPr>
@@ -3337,16 +3342,16 @@
           <a:xfrm>
             <a:off x="1948582" y="1499765"/>
             <a:ext cx="4925676" cy="1502168"/>
-            <a:chOff x="2456582" y="1438805"/>
+            <a:chOff x="1948582" y="1499765"/>
             <a:chExt cx="4925676" cy="1502168"/>
           </a:xfrm>
         </p:grpSpPr>
         <p:grpSp>
           <p:nvGrpSpPr>
-            <p:cNvPr id="179" name="组合 178">
+            <p:cNvPr id="3" name="组合 2">
               <a:extLst>
                 <a:ext uri="{FF2B5EF4-FFF2-40B4-BE49-F238E27FC236}">
-                  <a16:creationId xmlns:a16="http://schemas.microsoft.com/office/drawing/2014/main" id="{911560A9-7E62-589B-4BB7-0C17E6BDD782}"/>
+                  <a16:creationId xmlns:a16="http://schemas.microsoft.com/office/drawing/2014/main" id="{D56F02F8-A25F-6A8F-421A-7BEA3852B38C}"/>
                 </a:ext>
               </a:extLst>
             </p:cNvPr>
@@ -3355,7 +3360,7 @@
           </p:nvGrpSpPr>
           <p:grpSpPr>
             <a:xfrm>
-              <a:off x="2456582" y="1438805"/>
+              <a:off x="1948582" y="1499765"/>
               <a:ext cx="1797080" cy="1498278"/>
               <a:chOff x="2053781" y="1386484"/>
               <a:chExt cx="1797080" cy="1498278"/>
@@ -3365,10 +3370,10 @@
             <mc:Choice Requires="a14">
               <p:sp>
                 <p:nvSpPr>
-                  <p:cNvPr id="77" name="文本框 76">
+                  <p:cNvPr id="55" name="文本框 54">
                     <a:extLst>
                       <a:ext uri="{FF2B5EF4-FFF2-40B4-BE49-F238E27FC236}">
-                        <a16:creationId xmlns:a16="http://schemas.microsoft.com/office/drawing/2014/main" id="{7C3FD84C-5CCA-804F-AABF-0C8C152B7B64}"/>
+                        <a16:creationId xmlns:a16="http://schemas.microsoft.com/office/drawing/2014/main" id="{ED72C0AE-15A9-F4E1-3C38-87FEB653CCC4}"/>
                       </a:ext>
                     </a:extLst>
                   </p:cNvPr>
@@ -3404,7 +3409,7 @@
                     <a:r>
                       <a:rPr lang="en-US" altLang="zh-CN" sz="600" dirty="0">
                         <a:solidFill>
-                          <a:schemeClr val="accent2">
+                          <a:schemeClr val="accent5">
                             <a:lumMod val="75000"/>
                           </a:schemeClr>
                         </a:solidFill>
@@ -3486,10 +3491,10 @@
             <mc:Choice Requires="a14">
               <p:sp>
                 <p:nvSpPr>
-                  <p:cNvPr id="81" name="文本框 80">
+                  <p:cNvPr id="57" name="文本框 56">
                     <a:extLst>
                       <a:ext uri="{FF2B5EF4-FFF2-40B4-BE49-F238E27FC236}">
-                        <a16:creationId xmlns:a16="http://schemas.microsoft.com/office/drawing/2014/main" id="{F032875E-0F30-AC18-177C-767030B8EC6A}"/>
+                        <a16:creationId xmlns:a16="http://schemas.microsoft.com/office/drawing/2014/main" id="{4ED53D85-096F-0480-BA8F-0A18E26363A7}"/>
                       </a:ext>
                     </a:extLst>
                   </p:cNvPr>
@@ -3590,10 +3595,10 @@
           </mc:AlternateContent>
           <p:cxnSp>
             <p:nvCxnSpPr>
-              <p:cNvPr id="10" name="直接箭头连接符 9">
+              <p:cNvPr id="58" name="直接箭头连接符 57">
                 <a:extLst>
                   <a:ext uri="{FF2B5EF4-FFF2-40B4-BE49-F238E27FC236}">
-                    <a16:creationId xmlns:a16="http://schemas.microsoft.com/office/drawing/2014/main" id="{5875273A-5162-C1D8-4949-5D66793DC3DB}"/>
+                    <a16:creationId xmlns:a16="http://schemas.microsoft.com/office/drawing/2014/main" id="{F6E18448-928B-7789-6398-93F32D7BC13E}"/>
                   </a:ext>
                 </a:extLst>
               </p:cNvPr>
@@ -3631,10 +3636,10 @@
           </p:cxnSp>
           <p:cxnSp>
             <p:nvCxnSpPr>
-              <p:cNvPr id="20" name="直接箭头连接符 19">
+              <p:cNvPr id="59" name="直接箭头连接符 58">
                 <a:extLst>
                   <a:ext uri="{FF2B5EF4-FFF2-40B4-BE49-F238E27FC236}">
-                    <a16:creationId xmlns:a16="http://schemas.microsoft.com/office/drawing/2014/main" id="{998E4C60-0616-6D55-8409-445D62B30B14}"/>
+                    <a16:creationId xmlns:a16="http://schemas.microsoft.com/office/drawing/2014/main" id="{A5C2FEEF-60F0-C749-9F8D-B28695D5A2E8}"/>
                   </a:ext>
                 </a:extLst>
               </p:cNvPr>
@@ -3670,10 +3675,10 @@
           </p:cxnSp>
           <p:cxnSp>
             <p:nvCxnSpPr>
-              <p:cNvPr id="22" name="直接连接符 21">
+              <p:cNvPr id="60" name="直接连接符 59">
                 <a:extLst>
                   <a:ext uri="{FF2B5EF4-FFF2-40B4-BE49-F238E27FC236}">
-                    <a16:creationId xmlns:a16="http://schemas.microsoft.com/office/drawing/2014/main" id="{F192FD77-4358-949F-115A-F94044C53BE1}"/>
+                    <a16:creationId xmlns:a16="http://schemas.microsoft.com/office/drawing/2014/main" id="{C54A1891-6489-2001-B638-3FD23467445B}"/>
                   </a:ext>
                 </a:extLst>
               </p:cNvPr>
@@ -3707,10 +3712,10 @@
           </p:cxnSp>
           <p:cxnSp>
             <p:nvCxnSpPr>
-              <p:cNvPr id="24" name="直接连接符 23">
+              <p:cNvPr id="61" name="直接连接符 60">
                 <a:extLst>
                   <a:ext uri="{FF2B5EF4-FFF2-40B4-BE49-F238E27FC236}">
-                    <a16:creationId xmlns:a16="http://schemas.microsoft.com/office/drawing/2014/main" id="{FD88EAF5-FE4F-57BB-F03B-C241B07742EB}"/>
+                    <a16:creationId xmlns:a16="http://schemas.microsoft.com/office/drawing/2014/main" id="{4BAF63BC-54AC-B691-A9BC-9B2AD249281A}"/>
                   </a:ext>
                 </a:extLst>
               </p:cNvPr>
@@ -3748,10 +3753,10 @@
           </p:cxnSp>
           <p:cxnSp>
             <p:nvCxnSpPr>
-              <p:cNvPr id="27" name="直接连接符 26">
+              <p:cNvPr id="62" name="直接连接符 61">
                 <a:extLst>
                   <a:ext uri="{FF2B5EF4-FFF2-40B4-BE49-F238E27FC236}">
-                    <a16:creationId xmlns:a16="http://schemas.microsoft.com/office/drawing/2014/main" id="{BFD1350A-80D3-F4CF-DB86-CBAE2C1826C9}"/>
+                    <a16:creationId xmlns:a16="http://schemas.microsoft.com/office/drawing/2014/main" id="{FCCD10EF-E2C5-13CD-9342-13CF0A9C0B17}"/>
                   </a:ext>
                 </a:extLst>
               </p:cNvPr>
@@ -3789,10 +3794,10 @@
             <mc:Choice Requires="a14">
               <p:sp>
                 <p:nvSpPr>
-                  <p:cNvPr id="33" name="文本框 32">
+                  <p:cNvPr id="63" name="文本框 62">
                     <a:extLst>
                       <a:ext uri="{FF2B5EF4-FFF2-40B4-BE49-F238E27FC236}">
-                        <a16:creationId xmlns:a16="http://schemas.microsoft.com/office/drawing/2014/main" id="{3A0C99AB-0F4D-E58A-754F-36727D05D8ED}"/>
+                        <a16:creationId xmlns:a16="http://schemas.microsoft.com/office/drawing/2014/main" id="{BF70C28F-7595-98FE-50E5-3DB0D8DCA1F1}"/>
                       </a:ext>
                     </a:extLst>
                   </p:cNvPr>
@@ -3892,10 +3897,10 @@
             <mc:Choice Requires="a14">
               <p:sp>
                 <p:nvSpPr>
-                  <p:cNvPr id="34" name="文本框 33">
+                  <p:cNvPr id="64" name="文本框 63">
                     <a:extLst>
                       <a:ext uri="{FF2B5EF4-FFF2-40B4-BE49-F238E27FC236}">
-                        <a16:creationId xmlns:a16="http://schemas.microsoft.com/office/drawing/2014/main" id="{7CA883FE-4068-A559-9D11-297DD2EE570B}"/>
+                        <a16:creationId xmlns:a16="http://schemas.microsoft.com/office/drawing/2014/main" id="{8F7F928E-2A7A-23E5-665B-776B83AC0718}"/>
                       </a:ext>
                     </a:extLst>
                   </p:cNvPr>
@@ -4020,10 +4025,10 @@
             <mc:Choice Requires="a14">
               <p:sp>
                 <p:nvSpPr>
-                  <p:cNvPr id="35" name="文本框 34">
+                  <p:cNvPr id="65" name="文本框 64">
                     <a:extLst>
                       <a:ext uri="{FF2B5EF4-FFF2-40B4-BE49-F238E27FC236}">
-                        <a16:creationId xmlns:a16="http://schemas.microsoft.com/office/drawing/2014/main" id="{68210F7D-706B-1D6C-853F-19D2977DD0B5}"/>
+                        <a16:creationId xmlns:a16="http://schemas.microsoft.com/office/drawing/2014/main" id="{690C1DCD-31C6-C477-1DCB-06CFEF9328C6}"/>
                       </a:ext>
                     </a:extLst>
                   </p:cNvPr>
@@ -4148,10 +4153,10 @@
             <mc:Choice Requires="a14">
               <p:sp>
                 <p:nvSpPr>
-                  <p:cNvPr id="36" name="文本框 35">
+                  <p:cNvPr id="66" name="文本框 65">
                     <a:extLst>
                       <a:ext uri="{FF2B5EF4-FFF2-40B4-BE49-F238E27FC236}">
-                        <a16:creationId xmlns:a16="http://schemas.microsoft.com/office/drawing/2014/main" id="{FF484414-E96C-00A8-EADA-F06D74384FC8}"/>
+                        <a16:creationId xmlns:a16="http://schemas.microsoft.com/office/drawing/2014/main" id="{A787D57B-CD31-39D5-29D5-1CFAF416CF8A}"/>
                       </a:ext>
                     </a:extLst>
                   </p:cNvPr>
@@ -4301,10 +4306,10 @@
             <mc:Choice Requires="a14">
               <p:sp>
                 <p:nvSpPr>
-                  <p:cNvPr id="37" name="文本框 36">
+                  <p:cNvPr id="67" name="文本框 66">
                     <a:extLst>
                       <a:ext uri="{FF2B5EF4-FFF2-40B4-BE49-F238E27FC236}">
-                        <a16:creationId xmlns:a16="http://schemas.microsoft.com/office/drawing/2014/main" id="{0E19E681-2404-F0CE-873B-C5BA6729B57B}"/>
+                        <a16:creationId xmlns:a16="http://schemas.microsoft.com/office/drawing/2014/main" id="{8DC6F4F7-F995-4226-14C1-C51EEBAAC6C1}"/>
                       </a:ext>
                     </a:extLst>
                   </p:cNvPr>
@@ -4402,10 +4407,10 @@
           </mc:AlternateContent>
           <p:sp>
             <p:nvSpPr>
-              <p:cNvPr id="40" name="右大括号 39">
+              <p:cNvPr id="68" name="右大括号 67">
                 <a:extLst>
                   <a:ext uri="{FF2B5EF4-FFF2-40B4-BE49-F238E27FC236}">
-                    <a16:creationId xmlns:a16="http://schemas.microsoft.com/office/drawing/2014/main" id="{55654A33-BC79-F543-F1FE-2C1E8A40F707}"/>
+                    <a16:creationId xmlns:a16="http://schemas.microsoft.com/office/drawing/2014/main" id="{447AAEB2-4970-342F-528D-333F7F216E8D}"/>
                   </a:ext>
                 </a:extLst>
               </p:cNvPr>
@@ -4447,10 +4452,10 @@
           </p:sp>
           <p:sp>
             <p:nvSpPr>
-              <p:cNvPr id="41" name="右大括号 40">
+              <p:cNvPr id="70" name="右大括号 69">
                 <a:extLst>
                   <a:ext uri="{FF2B5EF4-FFF2-40B4-BE49-F238E27FC236}">
-                    <a16:creationId xmlns:a16="http://schemas.microsoft.com/office/drawing/2014/main" id="{7A102A10-4E4F-A18D-9C70-3A403167C7A8}"/>
+                    <a16:creationId xmlns:a16="http://schemas.microsoft.com/office/drawing/2014/main" id="{8C912A0B-AC5F-7CBE-CBA5-123ADA57D9E9}"/>
                   </a:ext>
                 </a:extLst>
               </p:cNvPr>
@@ -4492,10 +4497,10 @@
           </p:sp>
           <p:cxnSp>
             <p:nvCxnSpPr>
-              <p:cNvPr id="47" name="直接箭头连接符 46">
+              <p:cNvPr id="71" name="直接箭头连接符 70">
                 <a:extLst>
                   <a:ext uri="{FF2B5EF4-FFF2-40B4-BE49-F238E27FC236}">
-                    <a16:creationId xmlns:a16="http://schemas.microsoft.com/office/drawing/2014/main" id="{D125062C-8B35-E6F8-EE46-6CF4E66A4C2D}"/>
+                    <a16:creationId xmlns:a16="http://schemas.microsoft.com/office/drawing/2014/main" id="{F530CA6A-43C3-6306-777E-7A242D9CFA5E}"/>
                   </a:ext>
                 </a:extLst>
               </p:cNvPr>
@@ -4537,10 +4542,10 @@
           </p:cxnSp>
           <p:sp>
             <p:nvSpPr>
-              <p:cNvPr id="69" name="文本框 68">
+              <p:cNvPr id="72" name="文本框 71">
                 <a:extLst>
                   <a:ext uri="{FF2B5EF4-FFF2-40B4-BE49-F238E27FC236}">
-                    <a16:creationId xmlns:a16="http://schemas.microsoft.com/office/drawing/2014/main" id="{C69F8CE3-A09E-E96E-12FD-BABFCDAD60F1}"/>
+                    <a16:creationId xmlns:a16="http://schemas.microsoft.com/office/drawing/2014/main" id="{3FE40CB1-3C37-BEDB-1B73-F22C62F7D70E}"/>
                   </a:ext>
                 </a:extLst>
               </p:cNvPr>
@@ -4581,10 +4586,10 @@
             <mc:Choice Requires="a14">
               <p:sp>
                 <p:nvSpPr>
-                  <p:cNvPr id="107" name="文本框 106">
+                  <p:cNvPr id="73" name="文本框 72">
                     <a:extLst>
                       <a:ext uri="{FF2B5EF4-FFF2-40B4-BE49-F238E27FC236}">
-                        <a16:creationId xmlns:a16="http://schemas.microsoft.com/office/drawing/2014/main" id="{D5D3B452-CC58-C4F4-5EF9-966E2202D110}"/>
+                        <a16:creationId xmlns:a16="http://schemas.microsoft.com/office/drawing/2014/main" id="{C4BB98DB-7682-399C-E70A-4FE3AEBF1AC3}"/>
                       </a:ext>
                     </a:extLst>
                   </p:cNvPr>
@@ -4676,10 +4681,10 @@
         </p:grpSp>
         <p:grpSp>
           <p:nvGrpSpPr>
-            <p:cNvPr id="178" name="组合 177">
+            <p:cNvPr id="4" name="组合 3">
               <a:extLst>
                 <a:ext uri="{FF2B5EF4-FFF2-40B4-BE49-F238E27FC236}">
-                  <a16:creationId xmlns:a16="http://schemas.microsoft.com/office/drawing/2014/main" id="{A33495F9-795B-E20D-7031-32E81A9EB5EE}"/>
+                  <a16:creationId xmlns:a16="http://schemas.microsoft.com/office/drawing/2014/main" id="{F6BB740C-B46A-D02E-90E6-3B81E8BC245F}"/>
                 </a:ext>
               </a:extLst>
             </p:cNvPr>
@@ -4688,7 +4693,7 @@
           </p:nvGrpSpPr>
           <p:grpSpPr>
             <a:xfrm>
-              <a:off x="4059785" y="1442695"/>
+              <a:off x="3551785" y="1503655"/>
               <a:ext cx="1486506" cy="1498278"/>
               <a:chOff x="4219501" y="1368490"/>
               <a:chExt cx="1486506" cy="1498278"/>
@@ -4698,10 +4703,10 @@
             <mc:Choice Requires="a14">
               <p:sp>
                 <p:nvSpPr>
-                  <p:cNvPr id="97" name="文本框 96">
+                  <p:cNvPr id="28" name="文本框 27">
                     <a:extLst>
                       <a:ext uri="{FF2B5EF4-FFF2-40B4-BE49-F238E27FC236}">
-                        <a16:creationId xmlns:a16="http://schemas.microsoft.com/office/drawing/2014/main" id="{38C933E7-CD25-E48A-4160-2FBE9B0C4F14}"/>
+                        <a16:creationId xmlns:a16="http://schemas.microsoft.com/office/drawing/2014/main" id="{CA84CE19-ACA8-BECF-D8AA-764A4FDB8506}"/>
                       </a:ext>
                     </a:extLst>
                   </p:cNvPr>
@@ -4807,10 +4812,10 @@
             <mc:Choice Requires="a14">
               <p:sp>
                 <p:nvSpPr>
-                  <p:cNvPr id="98" name="文本框 97">
+                  <p:cNvPr id="29" name="文本框 28">
                     <a:extLst>
                       <a:ext uri="{FF2B5EF4-FFF2-40B4-BE49-F238E27FC236}">
-                        <a16:creationId xmlns:a16="http://schemas.microsoft.com/office/drawing/2014/main" id="{3E013871-7E84-9085-9166-FEFE99FE5AD7}"/>
+                        <a16:creationId xmlns:a16="http://schemas.microsoft.com/office/drawing/2014/main" id="{85FC259A-B756-C941-850C-6A25F1683365}"/>
                       </a:ext>
                     </a:extLst>
                   </p:cNvPr>
@@ -4913,10 +4918,10 @@
             <mc:Choice Requires="a14">
               <p:sp>
                 <p:nvSpPr>
-                  <p:cNvPr id="56" name="文本框 55">
+                  <p:cNvPr id="30" name="文本框 29">
                     <a:extLst>
                       <a:ext uri="{FF2B5EF4-FFF2-40B4-BE49-F238E27FC236}">
-                        <a16:creationId xmlns:a16="http://schemas.microsoft.com/office/drawing/2014/main" id="{227F91EF-1865-2BCD-239D-19245D1F0F0D}"/>
+                        <a16:creationId xmlns:a16="http://schemas.microsoft.com/office/drawing/2014/main" id="{700C7AB1-1151-0148-90C3-46868929ED88}"/>
                       </a:ext>
                     </a:extLst>
                   </p:cNvPr>
@@ -5093,10 +5098,10 @@
           </mc:AlternateContent>
           <p:cxnSp>
             <p:nvCxnSpPr>
-              <p:cNvPr id="83" name="直接箭头连接符 82">
+              <p:cNvPr id="31" name="直接箭头连接符 30">
                 <a:extLst>
                   <a:ext uri="{FF2B5EF4-FFF2-40B4-BE49-F238E27FC236}">
-                    <a16:creationId xmlns:a16="http://schemas.microsoft.com/office/drawing/2014/main" id="{2E92D6E1-44CD-DA45-1DFB-086B64A95FBC}"/>
+                    <a16:creationId xmlns:a16="http://schemas.microsoft.com/office/drawing/2014/main" id="{F95D0709-E7CF-144C-FF12-54CC9BE1CE4C}"/>
                   </a:ext>
                 </a:extLst>
               </p:cNvPr>
@@ -5134,10 +5139,10 @@
           </p:cxnSp>
           <p:cxnSp>
             <p:nvCxnSpPr>
-              <p:cNvPr id="84" name="直接箭头连接符 83">
+              <p:cNvPr id="32" name="直接箭头连接符 31">
                 <a:extLst>
                   <a:ext uri="{FF2B5EF4-FFF2-40B4-BE49-F238E27FC236}">
-                    <a16:creationId xmlns:a16="http://schemas.microsoft.com/office/drawing/2014/main" id="{C6AF9AC9-832F-4E33-A207-852B9A3FBD0A}"/>
+                    <a16:creationId xmlns:a16="http://schemas.microsoft.com/office/drawing/2014/main" id="{A7A14F42-9F61-2717-B039-B5F11D2DF4E2}"/>
                   </a:ext>
                 </a:extLst>
               </p:cNvPr>
@@ -5173,10 +5178,10 @@
           </p:cxnSp>
           <p:cxnSp>
             <p:nvCxnSpPr>
-              <p:cNvPr id="85" name="直接连接符 84">
+              <p:cNvPr id="38" name="直接连接符 37">
                 <a:extLst>
                   <a:ext uri="{FF2B5EF4-FFF2-40B4-BE49-F238E27FC236}">
-                    <a16:creationId xmlns:a16="http://schemas.microsoft.com/office/drawing/2014/main" id="{053E9F45-33E2-B4FE-1E5B-077245A418B2}"/>
+                    <a16:creationId xmlns:a16="http://schemas.microsoft.com/office/drawing/2014/main" id="{61442745-7CEA-FF1B-504D-71050386F026}"/>
                   </a:ext>
                 </a:extLst>
               </p:cNvPr>
@@ -5210,10 +5215,10 @@
           </p:cxnSp>
           <p:cxnSp>
             <p:nvCxnSpPr>
-              <p:cNvPr id="86" name="直接连接符 85">
+              <p:cNvPr id="39" name="直接连接符 38">
                 <a:extLst>
                   <a:ext uri="{FF2B5EF4-FFF2-40B4-BE49-F238E27FC236}">
-                    <a16:creationId xmlns:a16="http://schemas.microsoft.com/office/drawing/2014/main" id="{8F32718E-37C9-CB90-918E-A0443EC0B6C0}"/>
+                    <a16:creationId xmlns:a16="http://schemas.microsoft.com/office/drawing/2014/main" id="{4826FE2E-E024-DCD8-B914-B70E6FB5C67D}"/>
                   </a:ext>
                 </a:extLst>
               </p:cNvPr>
@@ -5251,10 +5256,10 @@
           </p:cxnSp>
           <p:cxnSp>
             <p:nvCxnSpPr>
-              <p:cNvPr id="87" name="直接连接符 86">
+              <p:cNvPr id="42" name="直接连接符 41">
                 <a:extLst>
                   <a:ext uri="{FF2B5EF4-FFF2-40B4-BE49-F238E27FC236}">
-                    <a16:creationId xmlns:a16="http://schemas.microsoft.com/office/drawing/2014/main" id="{01198E43-E901-5EB1-0304-BB792D26B0A5}"/>
+                    <a16:creationId xmlns:a16="http://schemas.microsoft.com/office/drawing/2014/main" id="{4A904C25-435C-F195-EC4A-75E2AFF661C2}"/>
                   </a:ext>
                 </a:extLst>
               </p:cNvPr>
@@ -5292,10 +5297,10 @@
             <mc:Choice Requires="a14">
               <p:sp>
                 <p:nvSpPr>
-                  <p:cNvPr id="88" name="文本框 87">
+                  <p:cNvPr id="43" name="文本框 42">
                     <a:extLst>
                       <a:ext uri="{FF2B5EF4-FFF2-40B4-BE49-F238E27FC236}">
-                        <a16:creationId xmlns:a16="http://schemas.microsoft.com/office/drawing/2014/main" id="{1611CF8F-7A9A-7044-7968-3DF3B4649613}"/>
+                        <a16:creationId xmlns:a16="http://schemas.microsoft.com/office/drawing/2014/main" id="{5CE0321D-4D36-7ED6-E0A5-F150A39181E1}"/>
                       </a:ext>
                     </a:extLst>
                   </p:cNvPr>
@@ -5395,10 +5400,10 @@
             <mc:Choice Requires="a14">
               <p:sp>
                 <p:nvSpPr>
-                  <p:cNvPr id="89" name="文本框 88">
+                  <p:cNvPr id="44" name="文本框 43">
                     <a:extLst>
                       <a:ext uri="{FF2B5EF4-FFF2-40B4-BE49-F238E27FC236}">
-                        <a16:creationId xmlns:a16="http://schemas.microsoft.com/office/drawing/2014/main" id="{443D7046-4860-27C1-24D2-955BF5B3FDC0}"/>
+                        <a16:creationId xmlns:a16="http://schemas.microsoft.com/office/drawing/2014/main" id="{C46C56BB-8C94-952F-FC8C-88E94E256297}"/>
                       </a:ext>
                     </a:extLst>
                   </p:cNvPr>
@@ -5523,10 +5528,10 @@
             <mc:Choice Requires="a14">
               <p:sp>
                 <p:nvSpPr>
-                  <p:cNvPr id="90" name="文本框 89">
+                  <p:cNvPr id="45" name="文本框 44">
                     <a:extLst>
                       <a:ext uri="{FF2B5EF4-FFF2-40B4-BE49-F238E27FC236}">
-                        <a16:creationId xmlns:a16="http://schemas.microsoft.com/office/drawing/2014/main" id="{0D3674B2-5B15-B38A-DFBD-3390A1986C2C}"/>
+                        <a16:creationId xmlns:a16="http://schemas.microsoft.com/office/drawing/2014/main" id="{317C9716-6D64-BE09-5F73-4CEB56D03D86}"/>
                       </a:ext>
                     </a:extLst>
                   </p:cNvPr>
@@ -5651,10 +5656,10 @@
             <mc:Choice Requires="a14">
               <p:sp>
                 <p:nvSpPr>
-                  <p:cNvPr id="92" name="文本框 91">
+                  <p:cNvPr id="46" name="文本框 45">
                     <a:extLst>
                       <a:ext uri="{FF2B5EF4-FFF2-40B4-BE49-F238E27FC236}">
-                        <a16:creationId xmlns:a16="http://schemas.microsoft.com/office/drawing/2014/main" id="{EE3D09A4-E877-F902-A613-D3287F9D15E4}"/>
+                        <a16:creationId xmlns:a16="http://schemas.microsoft.com/office/drawing/2014/main" id="{D79C8900-69D8-D367-7914-A03AEC155663}"/>
                       </a:ext>
                     </a:extLst>
                   </p:cNvPr>
@@ -5752,10 +5757,10 @@
           </mc:AlternateContent>
           <p:sp>
             <p:nvSpPr>
-              <p:cNvPr id="94" name="右大括号 93">
+              <p:cNvPr id="48" name="右大括号 47">
                 <a:extLst>
                   <a:ext uri="{FF2B5EF4-FFF2-40B4-BE49-F238E27FC236}">
-                    <a16:creationId xmlns:a16="http://schemas.microsoft.com/office/drawing/2014/main" id="{DDC67D15-A50A-A133-D006-2EFD77C201B4}"/>
+                    <a16:creationId xmlns:a16="http://schemas.microsoft.com/office/drawing/2014/main" id="{C34AFAB4-E9AC-B9CB-86A3-8C1CD54B3822}"/>
                   </a:ext>
                 </a:extLst>
               </p:cNvPr>
@@ -5797,10 +5802,10 @@
           </p:sp>
           <p:cxnSp>
             <p:nvCxnSpPr>
-              <p:cNvPr id="95" name="直接箭头连接符 94">
+              <p:cNvPr id="49" name="直接箭头连接符 48">
                 <a:extLst>
                   <a:ext uri="{FF2B5EF4-FFF2-40B4-BE49-F238E27FC236}">
-                    <a16:creationId xmlns:a16="http://schemas.microsoft.com/office/drawing/2014/main" id="{91C576EE-D284-74B3-5DB8-ECBB06E9D57B}"/>
+                    <a16:creationId xmlns:a16="http://schemas.microsoft.com/office/drawing/2014/main" id="{F621BA1F-8721-B1CF-EBF9-5AB68EFFB8E1}"/>
                   </a:ext>
                 </a:extLst>
               </p:cNvPr>
@@ -5842,10 +5847,10 @@
           </p:cxnSp>
           <p:sp>
             <p:nvSpPr>
-              <p:cNvPr id="96" name="文本框 95">
+              <p:cNvPr id="50" name="文本框 49">
                 <a:extLst>
                   <a:ext uri="{FF2B5EF4-FFF2-40B4-BE49-F238E27FC236}">
-                    <a16:creationId xmlns:a16="http://schemas.microsoft.com/office/drawing/2014/main" id="{72D1D412-AE72-E9FE-8CC4-829A823B47C2}"/>
+                    <a16:creationId xmlns:a16="http://schemas.microsoft.com/office/drawing/2014/main" id="{1E95ED2B-238E-ADEC-AC5A-817E798F5392}"/>
                   </a:ext>
                 </a:extLst>
               </p:cNvPr>
@@ -5884,10 +5889,10 @@
           </p:sp>
           <p:cxnSp>
             <p:nvCxnSpPr>
-              <p:cNvPr id="100" name="直接连接符 99">
+              <p:cNvPr id="51" name="直接连接符 50">
                 <a:extLst>
                   <a:ext uri="{FF2B5EF4-FFF2-40B4-BE49-F238E27FC236}">
-                    <a16:creationId xmlns:a16="http://schemas.microsoft.com/office/drawing/2014/main" id="{D1837E63-D1C9-3166-F957-F98C2AF14396}"/>
+                    <a16:creationId xmlns:a16="http://schemas.microsoft.com/office/drawing/2014/main" id="{E80AB160-2987-6506-97AD-25DCB178F895}"/>
                   </a:ext>
                 </a:extLst>
               </p:cNvPr>
@@ -5925,10 +5930,10 @@
           </p:cxnSp>
           <p:cxnSp>
             <p:nvCxnSpPr>
-              <p:cNvPr id="103" name="直接连接符 102">
+              <p:cNvPr id="52" name="直接连接符 51">
                 <a:extLst>
                   <a:ext uri="{FF2B5EF4-FFF2-40B4-BE49-F238E27FC236}">
-                    <a16:creationId xmlns:a16="http://schemas.microsoft.com/office/drawing/2014/main" id="{F77C0489-EE5B-DDB6-B93D-3FB92DF22497}"/>
+                    <a16:creationId xmlns:a16="http://schemas.microsoft.com/office/drawing/2014/main" id="{215E0169-B6C1-CD6B-5CA8-5F319F7A9942}"/>
                   </a:ext>
                 </a:extLst>
               </p:cNvPr>
@@ -5966,10 +5971,10 @@
           </p:cxnSp>
           <p:sp>
             <p:nvSpPr>
-              <p:cNvPr id="106" name="右大括号 105">
+              <p:cNvPr id="53" name="右大括号 52">
                 <a:extLst>
                   <a:ext uri="{FF2B5EF4-FFF2-40B4-BE49-F238E27FC236}">
-                    <a16:creationId xmlns:a16="http://schemas.microsoft.com/office/drawing/2014/main" id="{B7A1C0FD-0F7F-1305-117D-3FD226FACC2D}"/>
+                    <a16:creationId xmlns:a16="http://schemas.microsoft.com/office/drawing/2014/main" id="{0C2CA0EC-F73D-E8D3-EC68-C25F165AAF80}"/>
                   </a:ext>
                 </a:extLst>
               </p:cNvPr>
@@ -6013,10 +6018,10 @@
             <mc:Choice Requires="a14">
               <p:sp>
                 <p:nvSpPr>
-                  <p:cNvPr id="108" name="文本框 107">
+                  <p:cNvPr id="54" name="文本框 53">
                     <a:extLst>
                       <a:ext uri="{FF2B5EF4-FFF2-40B4-BE49-F238E27FC236}">
-                        <a16:creationId xmlns:a16="http://schemas.microsoft.com/office/drawing/2014/main" id="{76E60755-AAFF-4838-9C4B-3EB4CFE5ABAB}"/>
+                        <a16:creationId xmlns:a16="http://schemas.microsoft.com/office/drawing/2014/main" id="{CFD00BDC-8FF2-557D-3E8D-8B2666CE022C}"/>
                       </a:ext>
                     </a:extLst>
                   </p:cNvPr>
@@ -6108,10 +6113,10 @@
         </p:grpSp>
         <p:grpSp>
           <p:nvGrpSpPr>
-            <p:cNvPr id="180" name="组合 179">
+            <p:cNvPr id="5" name="组合 4">
               <a:extLst>
                 <a:ext uri="{FF2B5EF4-FFF2-40B4-BE49-F238E27FC236}">
-                  <a16:creationId xmlns:a16="http://schemas.microsoft.com/office/drawing/2014/main" id="{EF497458-4206-4F21-26B2-B0BFEAEA475C}"/>
+                  <a16:creationId xmlns:a16="http://schemas.microsoft.com/office/drawing/2014/main" id="{DE42E4EB-B506-972C-16CC-49C8BC78F354}"/>
                 </a:ext>
               </a:extLst>
             </p:cNvPr>
@@ -6120,20 +6125,20 @@
           </p:nvGrpSpPr>
           <p:grpSpPr>
             <a:xfrm>
-              <a:off x="5585178" y="1442695"/>
-              <a:ext cx="1797080" cy="1498278"/>
+              <a:off x="5077178" y="1503655"/>
+              <a:ext cx="1797080" cy="1493978"/>
               <a:chOff x="5899341" y="2877922"/>
-              <a:chExt cx="1797080" cy="1498278"/>
+              <a:chExt cx="1797080" cy="1493978"/>
             </a:xfrm>
           </p:grpSpPr>
           <mc:AlternateContent xmlns:mc="http://schemas.openxmlformats.org/markup-compatibility/2006" xmlns:a14="http://schemas.microsoft.com/office/drawing/2010/main">
             <mc:Choice Requires="a14">
               <p:sp>
                 <p:nvSpPr>
-                  <p:cNvPr id="161" name="文本框 160">
+                  <p:cNvPr id="7" name="文本框 6">
                     <a:extLst>
                       <a:ext uri="{FF2B5EF4-FFF2-40B4-BE49-F238E27FC236}">
-                        <a16:creationId xmlns:a16="http://schemas.microsoft.com/office/drawing/2014/main" id="{75717A3A-B700-BC56-0803-86EBFC929CAB}"/>
+                        <a16:creationId xmlns:a16="http://schemas.microsoft.com/office/drawing/2014/main" id="{065254FC-0C3C-285F-24ED-E283C7BB1284}"/>
                       </a:ext>
                     </a:extLst>
                   </p:cNvPr>
@@ -6169,7 +6174,7 @@
                     <a:r>
                       <a:rPr lang="en-US" altLang="zh-CN" sz="600" dirty="0">
                         <a:solidFill>
-                          <a:schemeClr val="accent2">
+                          <a:schemeClr val="accent5">
                             <a:lumMod val="75000"/>
                           </a:schemeClr>
                         </a:solidFill>
@@ -6186,7 +6191,7 @@
                           </m:rPr>
                           <a:rPr lang="en-US" altLang="zh-CN" sz="600" b="0" i="0" smtClean="0">
                             <a:solidFill>
-                              <a:schemeClr val="accent2">
+                              <a:schemeClr val="accent5">
                                 <a:lumMod val="75000"/>
                               </a:schemeClr>
                             </a:solidFill>
@@ -6251,132 +6256,6 @@
                   <a:blipFill>
                     <a:blip r:embed="rId17"/>
                     <a:stretch>
-                      <a:fillRect b="-3333"/>
-                    </a:stretch>
-                  </a:blipFill>
-                </p:spPr>
-                <p:txBody>
-                  <a:bodyPr/>
-                  <a:lstStyle/>
-                  <a:p>
-                    <a:r>
-                      <a:rPr lang="zh-CN" altLang="en-US">
-                        <a:noFill/>
-                      </a:rPr>
-                      <a:t> </a:t>
-                    </a:r>
-                  </a:p>
-                </p:txBody>
-              </p:sp>
-            </mc:Fallback>
-          </mc:AlternateContent>
-          <mc:AlternateContent xmlns:mc="http://schemas.openxmlformats.org/markup-compatibility/2006" xmlns:a14="http://schemas.microsoft.com/office/drawing/2010/main">
-            <mc:Choice Requires="a14">
-              <p:sp>
-                <p:nvSpPr>
-                  <p:cNvPr id="162" name="文本框 161">
-                    <a:extLst>
-                      <a:ext uri="{FF2B5EF4-FFF2-40B4-BE49-F238E27FC236}">
-                        <a16:creationId xmlns:a16="http://schemas.microsoft.com/office/drawing/2014/main" id="{7FA563E4-2D40-9D61-0CB3-7269C4825AD9}"/>
-                      </a:ext>
-                    </a:extLst>
-                  </p:cNvPr>
-                  <p:cNvSpPr txBox="1"/>
-                  <p:nvPr/>
-                </p:nvSpPr>
-                <p:spPr>
-                  <a:xfrm>
-                    <a:off x="6038103" y="4083402"/>
-                    <a:ext cx="1259578" cy="184666"/>
-                  </a:xfrm>
-                  <a:prstGeom prst="rect">
-                    <a:avLst/>
-                  </a:prstGeom>
-                  <a:noFill/>
-                </p:spPr>
-                <p:txBody>
-                  <a:bodyPr wrap="square" rtlCol="0">
-                    <a:spAutoFit/>
-                  </a:bodyPr>
-                  <a:lstStyle/>
-                  <a:p>
-                    <a:pPr/>
-                    <a14:m>
-                      <m:oMathPara xmlns:m="http://schemas.openxmlformats.org/officeDocument/2006/math">
-                        <m:oMathParaPr>
-                          <m:jc m:val="centerGroup"/>
-                        </m:oMathParaPr>
-                        <m:oMath xmlns:m="http://schemas.openxmlformats.org/officeDocument/2006/math">
-                          <m:r>
-                            <a:rPr lang="en-US" altLang="zh-CN" sz="600" b="0" i="1" smtClean="0">
-                              <a:solidFill>
-                                <a:schemeClr val="tx1"/>
-                              </a:solidFill>
-                              <a:latin typeface="Cambria Math" panose="02040503050406030204" pitchFamily="18" charset="0"/>
-                              <a:cs typeface="Times New Roman" panose="02020603050405020304" pitchFamily="18" charset="0"/>
-                            </a:rPr>
-                            <m:t>𝑦</m:t>
-                          </m:r>
-                          <m:r>
-                            <a:rPr lang="en-US" altLang="zh-CN" sz="600" b="0" i="1" smtClean="0">
-                              <a:solidFill>
-                                <a:schemeClr val="tx1"/>
-                              </a:solidFill>
-                              <a:latin typeface="Cambria Math" panose="02040503050406030204" pitchFamily="18" charset="0"/>
-                              <a:cs typeface="Times New Roman" panose="02020603050405020304" pitchFamily="18" charset="0"/>
-                            </a:rPr>
-                            <m:t>−</m:t>
-                          </m:r>
-                          <m:r>
-                            <a:rPr lang="en-US" altLang="zh-CN" sz="600" b="0" i="1" smtClean="0">
-                              <a:solidFill>
-                                <a:schemeClr val="tx1"/>
-                              </a:solidFill>
-                              <a:latin typeface="Cambria Math" panose="02040503050406030204" pitchFamily="18" charset="0"/>
-                              <a:cs typeface="Times New Roman" panose="02020603050405020304" pitchFamily="18" charset="0"/>
-                            </a:rPr>
-                            <m:t>𝑣</m:t>
-                          </m:r>
-                        </m:oMath>
-                      </m:oMathPara>
-                    </a14:m>
-                    <a:endParaRPr lang="zh-CN" altLang="en-US" sz="600" dirty="0">
-                      <a:solidFill>
-                        <a:schemeClr val="tx1"/>
-                      </a:solidFill>
-                      <a:latin typeface="Times New Roman" panose="02020603050405020304" pitchFamily="18" charset="0"/>
-                      <a:cs typeface="Times New Roman" panose="02020603050405020304" pitchFamily="18" charset="0"/>
-                    </a:endParaRPr>
-                  </a:p>
-                </p:txBody>
-              </p:sp>
-            </mc:Choice>
-            <mc:Fallback xmlns="">
-              <p:sp>
-                <p:nvSpPr>
-                  <p:cNvPr id="162" name="文本框 161">
-                    <a:extLst>
-                      <a:ext uri="{FF2B5EF4-FFF2-40B4-BE49-F238E27FC236}">
-                        <a16:creationId xmlns:a16="http://schemas.microsoft.com/office/drawing/2014/main" id="{7FA563E4-2D40-9D61-0CB3-7269C4825AD9}"/>
-                      </a:ext>
-                    </a:extLst>
-                  </p:cNvPr>
-                  <p:cNvSpPr txBox="1">
-                    <a:spLocks noRot="1" noChangeAspect="1" noMove="1" noResize="1" noEditPoints="1" noAdjustHandles="1" noChangeArrowheads="1" noChangeShapeType="1" noTextEdit="1"/>
-                  </p:cNvSpPr>
-                  <p:nvPr/>
-                </p:nvSpPr>
-                <p:spPr>
-                  <a:xfrm>
-                    <a:off x="6038103" y="4083402"/>
-                    <a:ext cx="1259578" cy="184666"/>
-                  </a:xfrm>
-                  <a:prstGeom prst="rect">
-                    <a:avLst/>
-                  </a:prstGeom>
-                  <a:blipFill>
-                    <a:blip r:embed="rId18"/>
-                    <a:stretch>
                       <a:fillRect/>
                     </a:stretch>
                   </a:blipFill>
@@ -6398,10 +6277,10 @@
           </mc:AlternateContent>
           <p:cxnSp>
             <p:nvCxnSpPr>
-              <p:cNvPr id="163" name="直接箭头连接符 162">
+              <p:cNvPr id="8" name="直接箭头连接符 7">
                 <a:extLst>
                   <a:ext uri="{FF2B5EF4-FFF2-40B4-BE49-F238E27FC236}">
-                    <a16:creationId xmlns:a16="http://schemas.microsoft.com/office/drawing/2014/main" id="{D41A806B-536D-8AB5-750B-F83892D464F5}"/>
+                    <a16:creationId xmlns:a16="http://schemas.microsoft.com/office/drawing/2014/main" id="{3D837059-B525-C986-5564-5A1DAD1EB866}"/>
                   </a:ext>
                 </a:extLst>
               </p:cNvPr>
@@ -6439,10 +6318,10 @@
           </p:cxnSp>
           <p:cxnSp>
             <p:nvCxnSpPr>
-              <p:cNvPr id="164" name="直接箭头连接符 163">
+              <p:cNvPr id="9" name="直接箭头连接符 8">
                 <a:extLst>
                   <a:ext uri="{FF2B5EF4-FFF2-40B4-BE49-F238E27FC236}">
-                    <a16:creationId xmlns:a16="http://schemas.microsoft.com/office/drawing/2014/main" id="{9AF8A05A-40B5-0215-B4AF-97678862CFFC}"/>
+                    <a16:creationId xmlns:a16="http://schemas.microsoft.com/office/drawing/2014/main" id="{3635A14C-9757-C375-5768-4A507C572001}"/>
                   </a:ext>
                 </a:extLst>
               </p:cNvPr>
@@ -6478,10 +6357,10 @@
           </p:cxnSp>
           <p:cxnSp>
             <p:nvCxnSpPr>
-              <p:cNvPr id="165" name="直接连接符 164">
+              <p:cNvPr id="11" name="直接连接符 10">
                 <a:extLst>
                   <a:ext uri="{FF2B5EF4-FFF2-40B4-BE49-F238E27FC236}">
-                    <a16:creationId xmlns:a16="http://schemas.microsoft.com/office/drawing/2014/main" id="{F78AE1DE-5845-EE1C-4E66-1A4D1E9454E9}"/>
+                    <a16:creationId xmlns:a16="http://schemas.microsoft.com/office/drawing/2014/main" id="{4CC19542-57C3-AEA9-6BDE-D63A5B44D92F}"/>
                   </a:ext>
                 </a:extLst>
               </p:cNvPr>
@@ -6515,10 +6394,10 @@
           </p:cxnSp>
           <p:cxnSp>
             <p:nvCxnSpPr>
-              <p:cNvPr id="166" name="直接连接符 165">
+              <p:cNvPr id="12" name="直接连接符 11">
                 <a:extLst>
                   <a:ext uri="{FF2B5EF4-FFF2-40B4-BE49-F238E27FC236}">
-                    <a16:creationId xmlns:a16="http://schemas.microsoft.com/office/drawing/2014/main" id="{CBB8EA3A-ACB2-105B-EF7E-1333B96A3FEA}"/>
+                    <a16:creationId xmlns:a16="http://schemas.microsoft.com/office/drawing/2014/main" id="{B017DF05-CCC8-BF74-9215-134E7D88DD2E}"/>
                   </a:ext>
                 </a:extLst>
               </p:cNvPr>
@@ -6556,10 +6435,10 @@
           </p:cxnSp>
           <p:cxnSp>
             <p:nvCxnSpPr>
-              <p:cNvPr id="167" name="直接连接符 166">
+              <p:cNvPr id="13" name="直接连接符 12">
                 <a:extLst>
                   <a:ext uri="{FF2B5EF4-FFF2-40B4-BE49-F238E27FC236}">
-                    <a16:creationId xmlns:a16="http://schemas.microsoft.com/office/drawing/2014/main" id="{547A4A67-66FF-E91A-4904-A74CB050BBAB}"/>
+                    <a16:creationId xmlns:a16="http://schemas.microsoft.com/office/drawing/2014/main" id="{662ED480-1714-6BE5-4AB8-EBC34B6134BC}"/>
                   </a:ext>
                 </a:extLst>
               </p:cNvPr>
@@ -6597,10 +6476,10 @@
             <mc:Choice Requires="a14">
               <p:sp>
                 <p:nvSpPr>
-                  <p:cNvPr id="168" name="文本框 167">
+                  <p:cNvPr id="14" name="文本框 13">
                     <a:extLst>
                       <a:ext uri="{FF2B5EF4-FFF2-40B4-BE49-F238E27FC236}">
-                        <a16:creationId xmlns:a16="http://schemas.microsoft.com/office/drawing/2014/main" id="{2A1D3C2D-BB74-FE80-448A-11535E2AB147}"/>
+                        <a16:creationId xmlns:a16="http://schemas.microsoft.com/office/drawing/2014/main" id="{1B5EA769-F079-7C7D-64F5-17F5DA06FE5B}"/>
                       </a:ext>
                     </a:extLst>
                   </p:cNvPr>
@@ -6700,10 +6579,10 @@
             <mc:Choice Requires="a14">
               <p:sp>
                 <p:nvSpPr>
-                  <p:cNvPr id="169" name="文本框 168">
+                  <p:cNvPr id="15" name="文本框 14">
                     <a:extLst>
                       <a:ext uri="{FF2B5EF4-FFF2-40B4-BE49-F238E27FC236}">
-                        <a16:creationId xmlns:a16="http://schemas.microsoft.com/office/drawing/2014/main" id="{922654D4-F4EF-00BE-D6AB-4B45BAE3313A}"/>
+                        <a16:creationId xmlns:a16="http://schemas.microsoft.com/office/drawing/2014/main" id="{F9CA6AE9-18EC-6575-5BBB-74EFFBB50688}"/>
                       </a:ext>
                     </a:extLst>
                   </p:cNvPr>
@@ -6828,10 +6707,10 @@
             <mc:Choice Requires="a14">
               <p:sp>
                 <p:nvSpPr>
-                  <p:cNvPr id="170" name="文本框 169">
+                  <p:cNvPr id="16" name="文本框 15">
                     <a:extLst>
                       <a:ext uri="{FF2B5EF4-FFF2-40B4-BE49-F238E27FC236}">
-                        <a16:creationId xmlns:a16="http://schemas.microsoft.com/office/drawing/2014/main" id="{A19DDFF7-10C7-DF4C-844A-A93C82E96682}"/>
+                        <a16:creationId xmlns:a16="http://schemas.microsoft.com/office/drawing/2014/main" id="{09D5610F-7778-A604-EFBE-823C38A17AC0}"/>
                       </a:ext>
                     </a:extLst>
                   </p:cNvPr>
@@ -6956,10 +6835,10 @@
             <mc:Choice Requires="a14">
               <p:sp>
                 <p:nvSpPr>
-                  <p:cNvPr id="171" name="文本框 170">
+                  <p:cNvPr id="17" name="文本框 16">
                     <a:extLst>
                       <a:ext uri="{FF2B5EF4-FFF2-40B4-BE49-F238E27FC236}">
-                        <a16:creationId xmlns:a16="http://schemas.microsoft.com/office/drawing/2014/main" id="{2216F97D-CC41-08F2-F25B-524CB0905414}"/>
+                        <a16:creationId xmlns:a16="http://schemas.microsoft.com/office/drawing/2014/main" id="{8C2CB3B1-B273-FC9C-2EB9-C1E0B1EA6897}"/>
                       </a:ext>
                     </a:extLst>
                   </p:cNvPr>
@@ -7109,10 +6988,10 @@
             <mc:Choice Requires="a14">
               <p:sp>
                 <p:nvSpPr>
-                  <p:cNvPr id="172" name="文本框 171">
+                  <p:cNvPr id="18" name="文本框 17">
                     <a:extLst>
                       <a:ext uri="{FF2B5EF4-FFF2-40B4-BE49-F238E27FC236}">
-                        <a16:creationId xmlns:a16="http://schemas.microsoft.com/office/drawing/2014/main" id="{A3CFD69D-C2ED-85D3-E48A-8496813A542A}"/>
+                        <a16:creationId xmlns:a16="http://schemas.microsoft.com/office/drawing/2014/main" id="{2BAA8DFE-B308-8F61-20E1-BC9C37961AAC}"/>
                       </a:ext>
                     </a:extLst>
                   </p:cNvPr>
@@ -7210,10 +7089,10 @@
           </mc:AlternateContent>
           <p:sp>
             <p:nvSpPr>
-              <p:cNvPr id="173" name="右大括号 172">
+              <p:cNvPr id="19" name="右大括号 18">
                 <a:extLst>
                   <a:ext uri="{FF2B5EF4-FFF2-40B4-BE49-F238E27FC236}">
-                    <a16:creationId xmlns:a16="http://schemas.microsoft.com/office/drawing/2014/main" id="{8C67A0CC-DFF3-0E80-4D44-B372CBB0559A}"/>
+                    <a16:creationId xmlns:a16="http://schemas.microsoft.com/office/drawing/2014/main" id="{9C3323B8-654A-44FB-5B93-2B6AEFF9909B}"/>
                   </a:ext>
                 </a:extLst>
               </p:cNvPr>
@@ -7255,10 +7134,10 @@
           </p:sp>
           <p:sp>
             <p:nvSpPr>
-              <p:cNvPr id="174" name="右大括号 173">
+              <p:cNvPr id="21" name="右大括号 20">
                 <a:extLst>
                   <a:ext uri="{FF2B5EF4-FFF2-40B4-BE49-F238E27FC236}">
-                    <a16:creationId xmlns:a16="http://schemas.microsoft.com/office/drawing/2014/main" id="{8EA7AE72-B525-1897-4788-C7C2957522D0}"/>
+                    <a16:creationId xmlns:a16="http://schemas.microsoft.com/office/drawing/2014/main" id="{19F2A224-6909-AE6D-B8CA-C6458C73E93C}"/>
                   </a:ext>
                 </a:extLst>
               </p:cNvPr>
@@ -7298,12 +7177,54 @@
               </a:p>
             </p:txBody>
           </p:sp>
+          <p:sp>
+            <p:nvSpPr>
+              <p:cNvPr id="23" name="文本框 22">
+                <a:extLst>
+                  <a:ext uri="{FF2B5EF4-FFF2-40B4-BE49-F238E27FC236}">
+                    <a16:creationId xmlns:a16="http://schemas.microsoft.com/office/drawing/2014/main" id="{F8490E93-FC52-478B-1C5E-E1FB8D55943B}"/>
+                  </a:ext>
+                </a:extLst>
+              </p:cNvPr>
+              <p:cNvSpPr txBox="1"/>
+              <p:nvPr/>
+            </p:nvSpPr>
+            <p:spPr>
+              <a:xfrm>
+                <a:off x="6531831" y="4156456"/>
+                <a:ext cx="360941" cy="215444"/>
+              </a:xfrm>
+              <a:prstGeom prst="rect">
+                <a:avLst/>
+              </a:prstGeom>
+              <a:noFill/>
+            </p:spPr>
+            <p:txBody>
+              <a:bodyPr wrap="square" rtlCol="0">
+                <a:spAutoFit/>
+              </a:bodyPr>
+              <a:lstStyle/>
+              <a:p>
+                <a:r>
+                  <a:rPr lang="en-US" altLang="zh-CN" sz="800" dirty="0">
+                    <a:latin typeface="Times New Roman" panose="02020603050405020304" pitchFamily="18" charset="0"/>
+                    <a:cs typeface="Times New Roman" panose="02020603050405020304" pitchFamily="18" charset="0"/>
+                  </a:rPr>
+                  <a:t>(c)</a:t>
+                </a:r>
+                <a:endParaRPr lang="zh-CN" altLang="en-US" sz="800" dirty="0">
+                  <a:latin typeface="Times New Roman" panose="02020603050405020304" pitchFamily="18" charset="0"/>
+                  <a:cs typeface="Times New Roman" panose="02020603050405020304" pitchFamily="18" charset="0"/>
+                </a:endParaRPr>
+              </a:p>
+            </p:txBody>
+          </p:sp>
           <p:cxnSp>
             <p:nvCxnSpPr>
-              <p:cNvPr id="175" name="直接箭头连接符 174">
+              <p:cNvPr id="25" name="直接箭头连接符 24">
                 <a:extLst>
                   <a:ext uri="{FF2B5EF4-FFF2-40B4-BE49-F238E27FC236}">
-                    <a16:creationId xmlns:a16="http://schemas.microsoft.com/office/drawing/2014/main" id="{7095D3C4-FB27-5B1C-B7AF-3D7497941416}"/>
+                    <a16:creationId xmlns:a16="http://schemas.microsoft.com/office/drawing/2014/main" id="{F1900057-94B2-C0B9-9CBF-6335077924A9}"/>
                   </a:ext>
                 </a:extLst>
               </p:cNvPr>
@@ -7343,56 +7264,14 @@
               </a:fontRef>
             </p:style>
           </p:cxnSp>
-          <p:sp>
-            <p:nvSpPr>
-              <p:cNvPr id="176" name="文本框 175">
-                <a:extLst>
-                  <a:ext uri="{FF2B5EF4-FFF2-40B4-BE49-F238E27FC236}">
-                    <a16:creationId xmlns:a16="http://schemas.microsoft.com/office/drawing/2014/main" id="{7A24A96C-4C37-F43E-9BAD-E5007ACECE64}"/>
-                  </a:ext>
-                </a:extLst>
-              </p:cNvPr>
-              <p:cNvSpPr txBox="1"/>
-              <p:nvPr/>
-            </p:nvSpPr>
-            <p:spPr>
-              <a:xfrm>
-                <a:off x="6520276" y="4160756"/>
-                <a:ext cx="360941" cy="215444"/>
-              </a:xfrm>
-              <a:prstGeom prst="rect">
-                <a:avLst/>
-              </a:prstGeom>
-              <a:noFill/>
-            </p:spPr>
-            <p:txBody>
-              <a:bodyPr wrap="square" rtlCol="0">
-                <a:spAutoFit/>
-              </a:bodyPr>
-              <a:lstStyle/>
-              <a:p>
-                <a:r>
-                  <a:rPr lang="en-US" altLang="zh-CN" sz="800" dirty="0">
-                    <a:latin typeface="Times New Roman" panose="02020603050405020304" pitchFamily="18" charset="0"/>
-                    <a:cs typeface="Times New Roman" panose="02020603050405020304" pitchFamily="18" charset="0"/>
-                  </a:rPr>
-                  <a:t>(c)</a:t>
-                </a:r>
-                <a:endParaRPr lang="zh-CN" altLang="en-US" sz="800" dirty="0">
-                  <a:latin typeface="Times New Roman" panose="02020603050405020304" pitchFamily="18" charset="0"/>
-                  <a:cs typeface="Times New Roman" panose="02020603050405020304" pitchFamily="18" charset="0"/>
-                </a:endParaRPr>
-              </a:p>
-            </p:txBody>
-          </p:sp>
           <mc:AlternateContent xmlns:mc="http://schemas.openxmlformats.org/markup-compatibility/2006" xmlns:a14="http://schemas.microsoft.com/office/drawing/2010/main">
             <mc:Choice Requires="a14">
               <p:sp>
                 <p:nvSpPr>
-                  <p:cNvPr id="177" name="文本框 176">
+                  <p:cNvPr id="26" name="文本框 25">
                     <a:extLst>
                       <a:ext uri="{FF2B5EF4-FFF2-40B4-BE49-F238E27FC236}">
-                        <a16:creationId xmlns:a16="http://schemas.microsoft.com/office/drawing/2014/main" id="{0ABB433C-F570-8615-5CCB-D6F253AD30D3}"/>
+                        <a16:creationId xmlns:a16="http://schemas.microsoft.com/office/drawing/2014/main" id="{C1BD6A9A-1840-E044-248C-1D091E91CD3B}"/>
                       </a:ext>
                     </a:extLst>
                   </p:cNvPr>
@@ -7482,6 +7361,112 @@
             </mc:Fallback>
           </mc:AlternateContent>
         </p:grpSp>
+        <mc:AlternateContent xmlns:mc="http://schemas.openxmlformats.org/markup-compatibility/2006" xmlns:a14="http://schemas.microsoft.com/office/drawing/2010/main">
+          <mc:Choice Requires="a14">
+            <p:sp>
+              <p:nvSpPr>
+                <p:cNvPr id="6" name="文本框 5">
+                  <a:extLst>
+                    <a:ext uri="{FF2B5EF4-FFF2-40B4-BE49-F238E27FC236}">
+                      <a16:creationId xmlns:a16="http://schemas.microsoft.com/office/drawing/2014/main" id="{01484AF6-C280-9F33-CF8B-B22DF2B83E0A}"/>
+                    </a:ext>
+                  </a:extLst>
+                </p:cNvPr>
+                <p:cNvSpPr txBox="1"/>
+                <p:nvPr/>
+              </p:nvSpPr>
+              <p:spPr>
+                <a:xfrm>
+                  <a:off x="5215940" y="2697107"/>
+                  <a:ext cx="1259578" cy="184666"/>
+                </a:xfrm>
+                <a:prstGeom prst="rect">
+                  <a:avLst/>
+                </a:prstGeom>
+                <a:noFill/>
+              </p:spPr>
+              <p:txBody>
+                <a:bodyPr wrap="square" rtlCol="0">
+                  <a:spAutoFit/>
+                </a:bodyPr>
+                <a:lstStyle/>
+                <a:p>
+                  <a:pPr/>
+                  <a14:m>
+                    <m:oMathPara xmlns:m="http://schemas.openxmlformats.org/officeDocument/2006/math">
+                      <m:oMathParaPr>
+                        <m:jc m:val="centerGroup"/>
+                      </m:oMathParaPr>
+                      <m:oMath xmlns:m="http://schemas.openxmlformats.org/officeDocument/2006/math">
+                        <m:r>
+                          <a:rPr lang="en-US" altLang="zh-CN" sz="600" b="0" i="1" smtClean="0">
+                            <a:solidFill>
+                              <a:schemeClr val="tx1"/>
+                            </a:solidFill>
+                            <a:latin typeface="Cambria Math" panose="02040503050406030204" pitchFamily="18" charset="0"/>
+                            <a:cs typeface="Times New Roman" panose="02020603050405020304" pitchFamily="18" charset="0"/>
+                          </a:rPr>
+                          <m:t>𝐸𝑢𝑙𝑒𝑟</m:t>
+                        </m:r>
+                      </m:oMath>
+                    </m:oMathPara>
+                  </a14:m>
+                  <a:endParaRPr lang="zh-CN" altLang="en-US" sz="600" dirty="0">
+                    <a:solidFill>
+                      <a:schemeClr val="tx1"/>
+                    </a:solidFill>
+                    <a:latin typeface="Times New Roman" panose="02020603050405020304" pitchFamily="18" charset="0"/>
+                    <a:cs typeface="Times New Roman" panose="02020603050405020304" pitchFamily="18" charset="0"/>
+                  </a:endParaRPr>
+                </a:p>
+              </p:txBody>
+            </p:sp>
+          </mc:Choice>
+          <mc:Fallback xmlns="">
+            <p:sp>
+              <p:nvSpPr>
+                <p:cNvPr id="2" name="文本框 1">
+                  <a:extLst>
+                    <a:ext uri="{FF2B5EF4-FFF2-40B4-BE49-F238E27FC236}">
+                      <a16:creationId xmlns:a16="http://schemas.microsoft.com/office/drawing/2014/main" id="{BE54617D-8BE0-8C9D-4E18-CF9BE21732D9}"/>
+                    </a:ext>
+                  </a:extLst>
+                </p:cNvPr>
+                <p:cNvSpPr txBox="1">
+                  <a:spLocks noRot="1" noChangeAspect="1" noMove="1" noResize="1" noEditPoints="1" noAdjustHandles="1" noChangeArrowheads="1" noChangeShapeType="1" noTextEdit="1"/>
+                </p:cNvSpPr>
+                <p:nvPr/>
+              </p:nvSpPr>
+              <p:spPr>
+                <a:xfrm>
+                  <a:off x="5215940" y="2697107"/>
+                  <a:ext cx="1259578" cy="184666"/>
+                </a:xfrm>
+                <a:prstGeom prst="rect">
+                  <a:avLst/>
+                </a:prstGeom>
+                <a:blipFill>
+                  <a:blip r:embed="rId22"/>
+                  <a:stretch>
+                    <a:fillRect/>
+                  </a:stretch>
+                </a:blipFill>
+              </p:spPr>
+              <p:txBody>
+                <a:bodyPr/>
+                <a:lstStyle/>
+                <a:p>
+                  <a:r>
+                    <a:rPr lang="zh-CN" altLang="en-US">
+                      <a:noFill/>
+                    </a:rPr>
+                    <a:t> </a:t>
+                  </a:r>
+                </a:p>
+              </p:txBody>
+            </p:sp>
+          </mc:Fallback>
+        </mc:AlternateContent>
       </p:grpSp>
     </p:spTree>
     <p:extLst>
